--- a/sotukenpawapo.pptx
+++ b/sotukenpawapo.pptx
@@ -126,304 +126,6 @@
     <p1510:client id="{DA3F50F7-1FE3-4BF1-8866-8ED667DF8A14}" v="7" dt="2026-08-17T08:36:22.403"/>
   </p1510:revLst>
 </p1510:revInfo>
-</file>
-
-<file path=ppt/changesInfos/changesInfo1.xml><?xml version="1.0" encoding="utf-8"?>
-<pc:chgInfo xmlns:a="http://schemas.openxmlformats.org/drawingml/2006/main" xmlns:r="http://schemas.openxmlformats.org/officeDocument/2006/relationships" xmlns:ac="http://schemas.microsoft.com/office/drawing/2013/main/command" xmlns:pc="http://schemas.microsoft.com/office/powerpoint/2013/main/command">
-  <pc:docChgLst>
-    <pc:chgData name="ギリェルミ 佐々木" userId="986c67ded3e3e19b" providerId="LiveId" clId="{145113DD-7874-4809-A419-6BE328331EF1}"/>
-    <pc:docChg chg="undo custSel addSld delSld modSld sldOrd">
-      <pc:chgData name="ギリェルミ 佐々木" userId="986c67ded3e3e19b" providerId="LiveId" clId="{145113DD-7874-4809-A419-6BE328331EF1}" dt="2026-08-17T08:45:10.495" v="520" actId="1076"/>
-      <pc:docMkLst>
-        <pc:docMk/>
-      </pc:docMkLst>
-      <pc:sldChg chg="addSp delSp modSp mod">
-        <pc:chgData name="ギリェルミ 佐々木" userId="986c67ded3e3e19b" providerId="LiveId" clId="{145113DD-7874-4809-A419-6BE328331EF1}" dt="2026-08-17T08:25:57.682" v="88" actId="1076"/>
-        <pc:sldMkLst>
-          <pc:docMk/>
-          <pc:sldMk cId="896653232" sldId="256"/>
-        </pc:sldMkLst>
-        <pc:spChg chg="mod">
-          <ac:chgData name="ギリェルミ 佐々木" userId="986c67ded3e3e19b" providerId="LiveId" clId="{145113DD-7874-4809-A419-6BE328331EF1}" dt="2026-08-17T08:25:57.682" v="88" actId="1076"/>
-          <ac:spMkLst>
-            <pc:docMk/>
-            <pc:sldMk cId="896653232" sldId="256"/>
-            <ac:spMk id="2" creationId="{C4E6978D-ED78-454E-93C9-77144221301F}"/>
-          </ac:spMkLst>
-        </pc:spChg>
-        <pc:spChg chg="del mod">
-          <ac:chgData name="ギリェルミ 佐々木" userId="986c67ded3e3e19b" providerId="LiveId" clId="{145113DD-7874-4809-A419-6BE328331EF1}" dt="2026-08-17T08:19:32.563" v="6" actId="21"/>
-          <ac:spMkLst>
-            <pc:docMk/>
-            <pc:sldMk cId="896653232" sldId="256"/>
-            <ac:spMk id="3" creationId="{9B9AF94E-5923-439B-B2C9-E286252CD91D}"/>
-          </ac:spMkLst>
-        </pc:spChg>
-        <pc:spChg chg="add mod">
-          <ac:chgData name="ギリェルミ 佐々木" userId="986c67ded3e3e19b" providerId="LiveId" clId="{145113DD-7874-4809-A419-6BE328331EF1}" dt="2026-08-17T08:20:26.089" v="62" actId="1076"/>
-          <ac:spMkLst>
-            <pc:docMk/>
-            <pc:sldMk cId="896653232" sldId="256"/>
-            <ac:spMk id="4" creationId="{299BFFEE-9F9B-BE03-1639-791A148C67EA}"/>
-          </ac:spMkLst>
-        </pc:spChg>
-      </pc:sldChg>
-      <pc:sldChg chg="modSp add del mod">
-        <pc:chgData name="ギリェルミ 佐々木" userId="986c67ded3e3e19b" providerId="LiveId" clId="{145113DD-7874-4809-A419-6BE328331EF1}" dt="2026-08-17T08:28:59.867" v="184" actId="255"/>
-        <pc:sldMkLst>
-          <pc:docMk/>
-          <pc:sldMk cId="3209835034" sldId="257"/>
-        </pc:sldMkLst>
-        <pc:spChg chg="mod">
-          <ac:chgData name="ギリェルミ 佐々木" userId="986c67ded3e3e19b" providerId="LiveId" clId="{145113DD-7874-4809-A419-6BE328331EF1}" dt="2026-08-17T08:28:59.867" v="184" actId="255"/>
-          <ac:spMkLst>
-            <pc:docMk/>
-            <pc:sldMk cId="3209835034" sldId="257"/>
-            <ac:spMk id="2" creationId="{C29549D1-4682-42B2-B56E-381ECC00F8CB}"/>
-          </ac:spMkLst>
-        </pc:spChg>
-        <pc:picChg chg="mod">
-          <ac:chgData name="ギリェルミ 佐々木" userId="986c67ded3e3e19b" providerId="LiveId" clId="{145113DD-7874-4809-A419-6BE328331EF1}" dt="2026-08-17T08:25:39.549" v="86" actId="1076"/>
-          <ac:picMkLst>
-            <pc:docMk/>
-            <pc:sldMk cId="3209835034" sldId="257"/>
-            <ac:picMk id="8" creationId="{7BD44B15-5EDA-4D79-9FB9-0215822BDA60}"/>
-          </ac:picMkLst>
-        </pc:picChg>
-      </pc:sldChg>
-      <pc:sldChg chg="modSp del mod">
-        <pc:chgData name="ギリェルミ 佐々木" userId="986c67ded3e3e19b" providerId="LiveId" clId="{145113DD-7874-4809-A419-6BE328331EF1}" dt="2026-08-17T08:07:02.301" v="3" actId="2696"/>
-        <pc:sldMkLst>
-          <pc:docMk/>
-          <pc:sldMk cId="2851186024" sldId="258"/>
-        </pc:sldMkLst>
-        <pc:spChg chg="mod">
-          <ac:chgData name="ギリェルミ 佐々木" userId="986c67ded3e3e19b" providerId="LiveId" clId="{145113DD-7874-4809-A419-6BE328331EF1}" dt="2026-08-17T08:06:44.124" v="0"/>
-          <ac:spMkLst>
-            <pc:docMk/>
-            <pc:sldMk cId="2851186024" sldId="258"/>
-            <ac:spMk id="2" creationId="{AEB65DFC-DC4B-423D-A294-768A9C39E348}"/>
-          </ac:spMkLst>
-        </pc:spChg>
-        <pc:spChg chg="mod">
-          <ac:chgData name="ギリェルミ 佐々木" userId="986c67ded3e3e19b" providerId="LiveId" clId="{145113DD-7874-4809-A419-6BE328331EF1}" dt="2026-08-17T08:06:44.192" v="1" actId="27636"/>
-          <ac:spMkLst>
-            <pc:docMk/>
-            <pc:sldMk cId="2851186024" sldId="258"/>
-            <ac:spMk id="3" creationId="{7CC3E03D-7F70-44DB-9A0E-C9A86E2F92E1}"/>
-          </ac:spMkLst>
-        </pc:spChg>
-      </pc:sldChg>
-      <pc:sldChg chg="modSp mod">
-        <pc:chgData name="ギリェルミ 佐々木" userId="986c67ded3e3e19b" providerId="LiveId" clId="{145113DD-7874-4809-A419-6BE328331EF1}" dt="2026-08-17T08:24:16.114" v="84" actId="1076"/>
-        <pc:sldMkLst>
-          <pc:docMk/>
-          <pc:sldMk cId="3137254365" sldId="259"/>
-        </pc:sldMkLst>
-        <pc:spChg chg="mod">
-          <ac:chgData name="ギリェルミ 佐々木" userId="986c67ded3e3e19b" providerId="LiveId" clId="{145113DD-7874-4809-A419-6BE328331EF1}" dt="2026-08-17T08:23:16.642" v="80" actId="255"/>
-          <ac:spMkLst>
-            <pc:docMk/>
-            <pc:sldMk cId="3137254365" sldId="259"/>
-            <ac:spMk id="2" creationId="{9145A3DE-C254-47AB-A4FE-5DBAC582E0D4}"/>
-          </ac:spMkLst>
-        </pc:spChg>
-        <pc:picChg chg="mod">
-          <ac:chgData name="ギリェルミ 佐々木" userId="986c67ded3e3e19b" providerId="LiveId" clId="{145113DD-7874-4809-A419-6BE328331EF1}" dt="2026-08-17T08:24:16.114" v="84" actId="1076"/>
-          <ac:picMkLst>
-            <pc:docMk/>
-            <pc:sldMk cId="3137254365" sldId="259"/>
-            <ac:picMk id="5" creationId="{596660A7-55C4-4BB7-9340-F80121F166C1}"/>
-          </ac:picMkLst>
-        </pc:picChg>
-      </pc:sldChg>
-      <pc:sldChg chg="modSp del">
-        <pc:chgData name="ギリェルミ 佐々木" userId="986c67ded3e3e19b" providerId="LiveId" clId="{145113DD-7874-4809-A419-6BE328331EF1}" dt="2026-08-17T08:24:05.971" v="83" actId="2696"/>
-        <pc:sldMkLst>
-          <pc:docMk/>
-          <pc:sldMk cId="2219642378" sldId="260"/>
-        </pc:sldMkLst>
-        <pc:spChg chg="mod">
-          <ac:chgData name="ギリェルミ 佐々木" userId="986c67ded3e3e19b" providerId="LiveId" clId="{145113DD-7874-4809-A419-6BE328331EF1}" dt="2026-08-17T08:07:28.694" v="4"/>
-          <ac:spMkLst>
-            <pc:docMk/>
-            <pc:sldMk cId="2219642378" sldId="260"/>
-            <ac:spMk id="2" creationId="{4800178A-37F9-42F2-9683-C0CF643ABC11}"/>
-          </ac:spMkLst>
-        </pc:spChg>
-        <pc:picChg chg="mod">
-          <ac:chgData name="ギリェルミ 佐々木" userId="986c67ded3e3e19b" providerId="LiveId" clId="{145113DD-7874-4809-A419-6BE328331EF1}" dt="2026-08-17T08:07:28.694" v="4"/>
-          <ac:picMkLst>
-            <pc:docMk/>
-            <pc:sldMk cId="2219642378" sldId="260"/>
-            <ac:picMk id="4" creationId="{9EE3B062-EC29-4549-9B3F-0521C38FA989}"/>
-          </ac:picMkLst>
-        </pc:picChg>
-      </pc:sldChg>
-      <pc:sldChg chg="modSp del">
-        <pc:chgData name="ギリェルミ 佐々木" userId="986c67ded3e3e19b" providerId="LiveId" clId="{145113DD-7874-4809-A419-6BE328331EF1}" dt="2026-08-17T08:44:21.640" v="513" actId="2696"/>
-        <pc:sldMkLst>
-          <pc:docMk/>
-          <pc:sldMk cId="2034873455" sldId="261"/>
-        </pc:sldMkLst>
-        <pc:spChg chg="mod">
-          <ac:chgData name="ギリェルミ 佐々木" userId="986c67ded3e3e19b" providerId="LiveId" clId="{145113DD-7874-4809-A419-6BE328331EF1}" dt="2026-08-17T08:07:28.694" v="4"/>
-          <ac:spMkLst>
-            <pc:docMk/>
-            <pc:sldMk cId="2034873455" sldId="261"/>
-            <ac:spMk id="2" creationId="{F99FD250-1819-4B56-B24C-2FD33919D012}"/>
-          </ac:spMkLst>
-        </pc:spChg>
-        <pc:picChg chg="mod">
-          <ac:chgData name="ギリェルミ 佐々木" userId="986c67ded3e3e19b" providerId="LiveId" clId="{145113DD-7874-4809-A419-6BE328331EF1}" dt="2026-08-17T08:07:28.694" v="4"/>
-          <ac:picMkLst>
-            <pc:docMk/>
-            <pc:sldMk cId="2034873455" sldId="261"/>
-            <ac:picMk id="4" creationId="{8DBB5E46-D8BC-4D4F-97D5-21B144A66DD5}"/>
-          </ac:picMkLst>
-        </pc:picChg>
-      </pc:sldChg>
-      <pc:sldChg chg="modSp mod ord">
-        <pc:chgData name="ギリェルミ 佐々木" userId="986c67ded3e3e19b" providerId="LiveId" clId="{145113DD-7874-4809-A419-6BE328331EF1}" dt="2026-08-17T08:44:40.918" v="516" actId="14100"/>
-        <pc:sldMkLst>
-          <pc:docMk/>
-          <pc:sldMk cId="3997646485" sldId="262"/>
-        </pc:sldMkLst>
-        <pc:spChg chg="mod">
-          <ac:chgData name="ギリェルミ 佐々木" userId="986c67ded3e3e19b" providerId="LiveId" clId="{145113DD-7874-4809-A419-6BE328331EF1}" dt="2026-08-17T08:29:37.885" v="188" actId="255"/>
-          <ac:spMkLst>
-            <pc:docMk/>
-            <pc:sldMk cId="3997646485" sldId="262"/>
-            <ac:spMk id="2" creationId="{B81BEA9C-C4C7-4C49-AC48-D9305FCF883F}"/>
-          </ac:spMkLst>
-        </pc:spChg>
-        <pc:picChg chg="mod">
-          <ac:chgData name="ギリェルミ 佐々木" userId="986c67ded3e3e19b" providerId="LiveId" clId="{145113DD-7874-4809-A419-6BE328331EF1}" dt="2026-08-17T08:44:40.918" v="516" actId="14100"/>
-          <ac:picMkLst>
-            <pc:docMk/>
-            <pc:sldMk cId="3997646485" sldId="262"/>
-            <ac:picMk id="4" creationId="{0D8112BC-E167-4B06-9951-8CF7EECA9B8F}"/>
-          </ac:picMkLst>
-        </pc:picChg>
-      </pc:sldChg>
-      <pc:sldChg chg="modSp mod ord">
-        <pc:chgData name="ギリェルミ 佐々木" userId="986c67ded3e3e19b" providerId="LiveId" clId="{145113DD-7874-4809-A419-6BE328331EF1}" dt="2026-08-17T08:45:10.495" v="520" actId="1076"/>
-        <pc:sldMkLst>
-          <pc:docMk/>
-          <pc:sldMk cId="277258447" sldId="263"/>
-        </pc:sldMkLst>
-        <pc:spChg chg="mod">
-          <ac:chgData name="ギリェルミ 佐々木" userId="986c67ded3e3e19b" providerId="LiveId" clId="{145113DD-7874-4809-A419-6BE328331EF1}" dt="2026-08-17T08:43:16.719" v="510" actId="255"/>
-          <ac:spMkLst>
-            <pc:docMk/>
-            <pc:sldMk cId="277258447" sldId="263"/>
-            <ac:spMk id="2" creationId="{D510955D-3A48-3C6F-50DD-8ECB963A06D7}"/>
-          </ac:spMkLst>
-        </pc:spChg>
-        <pc:picChg chg="mod">
-          <ac:chgData name="ギリェルミ 佐々木" userId="986c67ded3e3e19b" providerId="LiveId" clId="{145113DD-7874-4809-A419-6BE328331EF1}" dt="2026-08-17T08:45:10.495" v="520" actId="1076"/>
-          <ac:picMkLst>
-            <pc:docMk/>
-            <pc:sldMk cId="277258447" sldId="263"/>
-            <ac:picMk id="5" creationId="{BDE3D841-1BF2-3FC0-5866-1689ED3196FA}"/>
-          </ac:picMkLst>
-        </pc:picChg>
-      </pc:sldChg>
-      <pc:sldChg chg="modSp mod ord">
-        <pc:chgData name="ギリェルミ 佐々木" userId="986c67ded3e3e19b" providerId="LiveId" clId="{145113DD-7874-4809-A419-6BE328331EF1}" dt="2026-08-17T08:30:59.729" v="228" actId="255"/>
-        <pc:sldMkLst>
-          <pc:docMk/>
-          <pc:sldMk cId="1420328502" sldId="264"/>
-        </pc:sldMkLst>
-        <pc:spChg chg="mod">
-          <ac:chgData name="ギリェルミ 佐々木" userId="986c67ded3e3e19b" providerId="LiveId" clId="{145113DD-7874-4809-A419-6BE328331EF1}" dt="2026-08-17T08:30:59.729" v="228" actId="255"/>
-          <ac:spMkLst>
-            <pc:docMk/>
-            <pc:sldMk cId="1420328502" sldId="264"/>
-            <ac:spMk id="2" creationId="{1A8F2ACF-83E9-77AA-90B6-B72E5F951E5F}"/>
-          </ac:spMkLst>
-        </pc:spChg>
-        <pc:picChg chg="mod">
-          <ac:chgData name="ギリェルミ 佐々木" userId="986c67ded3e3e19b" providerId="LiveId" clId="{145113DD-7874-4809-A419-6BE328331EF1}" dt="2026-08-17T08:30:54.807" v="227" actId="1076"/>
-          <ac:picMkLst>
-            <pc:docMk/>
-            <pc:sldMk cId="1420328502" sldId="264"/>
-            <ac:picMk id="7" creationId="{59753D07-F71A-0C32-31CF-B0DD9377ABBB}"/>
-          </ac:picMkLst>
-        </pc:picChg>
-      </pc:sldChg>
-      <pc:sldChg chg="modSp mod ord">
-        <pc:chgData name="ギリェルミ 佐々木" userId="986c67ded3e3e19b" providerId="LiveId" clId="{145113DD-7874-4809-A419-6BE328331EF1}" dt="2026-08-17T08:32:35.335" v="251" actId="255"/>
-        <pc:sldMkLst>
-          <pc:docMk/>
-          <pc:sldMk cId="61010945" sldId="265"/>
-        </pc:sldMkLst>
-        <pc:spChg chg="mod">
-          <ac:chgData name="ギリェルミ 佐々木" userId="986c67ded3e3e19b" providerId="LiveId" clId="{145113DD-7874-4809-A419-6BE328331EF1}" dt="2026-08-17T08:32:35.335" v="251" actId="255"/>
-          <ac:spMkLst>
-            <pc:docMk/>
-            <pc:sldMk cId="61010945" sldId="265"/>
-            <ac:spMk id="2" creationId="{5C4A9196-5C23-B22E-46EB-F002E4F36BBE}"/>
-          </ac:spMkLst>
-        </pc:spChg>
-        <pc:graphicFrameChg chg="mod">
-          <ac:chgData name="ギリェルミ 佐々木" userId="986c67ded3e3e19b" providerId="LiveId" clId="{145113DD-7874-4809-A419-6BE328331EF1}" dt="2026-08-17T08:32:08.003" v="233" actId="1076"/>
-          <ac:graphicFrameMkLst>
-            <pc:docMk/>
-            <pc:sldMk cId="61010945" sldId="265"/>
-            <ac:graphicFrameMk id="4" creationId="{73669EAD-1CF1-E7DB-4D23-BABFFD46A5DD}"/>
-          </ac:graphicFrameMkLst>
-        </pc:graphicFrameChg>
-        <pc:graphicFrameChg chg="mod">
-          <ac:chgData name="ギリェルミ 佐々木" userId="986c67ded3e3e19b" providerId="LiveId" clId="{145113DD-7874-4809-A419-6BE328331EF1}" dt="2026-08-17T08:32:03.455" v="232" actId="1076"/>
-          <ac:graphicFrameMkLst>
-            <pc:docMk/>
-            <pc:sldMk cId="61010945" sldId="265"/>
-            <ac:graphicFrameMk id="5" creationId="{38246BBD-0596-2436-2A91-0E757B07461D}"/>
-          </ac:graphicFrameMkLst>
-        </pc:graphicFrameChg>
-      </pc:sldChg>
-      <pc:sldChg chg="modSp new mod">
-        <pc:chgData name="ギリェルミ 佐々木" userId="986c67ded3e3e19b" providerId="LiveId" clId="{145113DD-7874-4809-A419-6BE328331EF1}" dt="2026-08-17T08:37:39.958" v="455" actId="255"/>
-        <pc:sldMkLst>
-          <pc:docMk/>
-          <pc:sldMk cId="650701581" sldId="266"/>
-        </pc:sldMkLst>
-        <pc:spChg chg="mod">
-          <ac:chgData name="ギリェルミ 佐々木" userId="986c67ded3e3e19b" providerId="LiveId" clId="{145113DD-7874-4809-A419-6BE328331EF1}" dt="2026-08-17T08:36:22.403" v="365"/>
-          <ac:spMkLst>
-            <pc:docMk/>
-            <pc:sldMk cId="650701581" sldId="266"/>
-            <ac:spMk id="2" creationId="{EBB2BF80-C133-8B1C-6ABD-A1A2C8FDF5E6}"/>
-          </ac:spMkLst>
-        </pc:spChg>
-        <pc:spChg chg="mod">
-          <ac:chgData name="ギリェルミ 佐々木" userId="986c67ded3e3e19b" providerId="LiveId" clId="{145113DD-7874-4809-A419-6BE328331EF1}" dt="2026-08-17T08:37:39.958" v="455" actId="255"/>
-          <ac:spMkLst>
-            <pc:docMk/>
-            <pc:sldMk cId="650701581" sldId="266"/>
-            <ac:spMk id="3" creationId="{D3CAC064-4D71-C956-AF84-1791B59A29AF}"/>
-          </ac:spMkLst>
-        </pc:spChg>
-      </pc:sldChg>
-      <pc:sldChg chg="modSp new del">
-        <pc:chgData name="ギリェルミ 佐々木" userId="986c67ded3e3e19b" providerId="LiveId" clId="{145113DD-7874-4809-A419-6BE328331EF1}" dt="2026-08-17T08:37:43.336" v="456" actId="2696"/>
-        <pc:sldMkLst>
-          <pc:docMk/>
-          <pc:sldMk cId="3711326390" sldId="267"/>
-        </pc:sldMkLst>
-        <pc:spChg chg="mod">
-          <ac:chgData name="ギリェルミ 佐々木" userId="986c67ded3e3e19b" providerId="LiveId" clId="{145113DD-7874-4809-A419-6BE328331EF1}" dt="2026-08-17T08:35:13.762" v="280"/>
-          <ac:spMkLst>
-            <pc:docMk/>
-            <pc:sldMk cId="3711326390" sldId="267"/>
-            <ac:spMk id="2" creationId="{7033C8B5-0FF0-F67F-C266-3FB4C2888B08}"/>
-          </ac:spMkLst>
-        </pc:spChg>
-      </pc:sldChg>
-    </pc:docChg>
-  </pc:docChgLst>
-</pc:chgInfo>
 </file>
 
 <file path=ppt/slideLayouts/slideLayout1.xml><?xml version="1.0" encoding="utf-8"?>
